--- a/data/09_internal_training/training_14.pptx
+++ b/data/09_internal_training/training_14.pptx
@@ -3140,50 +3140,6 @@
           <a:p/>
           <a:p>
             <a:r>
-              <a:t>新宇龙信息传媒有限公司 是中国 机器人 行业的重要企业之一。</a:t>
-            </a:r>
-          </a:p>
-          <a:p>
-            <a:r>
-              <a:t>根据华辰资本 资产配置委员会 的研究，该公司成立于 2018 年，</a:t>
-            </a:r>
-          </a:p>
-          <a:p>
-            <a:r>
-              <a:t>目前员工规模约 6070 人。公司近年来持续加大研发投入，</a:t>
-            </a:r>
-          </a:p>
-          <a:p>
-            <a:r>
-              <a:t>在核心技术方面形成了较强的竞争壁垒。</a:t>
-            </a:r>
-          </a:p>
-          <a:p/>
-          <a:p/>
-          <a:p>
-            <a:r>
-              <a:t>和泰科技有限公司 是中国 人工智能 行业的重要企业之一。</a:t>
-            </a:r>
-          </a:p>
-          <a:p>
-            <a:r>
-              <a:t>根据华辰资本 风险管理部 的研究，该公司成立于 2008 年，</a:t>
-            </a:r>
-          </a:p>
-          <a:p>
-            <a:r>
-              <a:t>目前员工规模约 6443 人。公司近年来持续加大研发投入，</a:t>
-            </a:r>
-          </a:p>
-          <a:p>
-            <a:r>
-              <a:t>在核心技术方面形成了较强的竞争壁垒。</a:t>
-            </a:r>
-          </a:p>
-          <a:p/>
-          <a:p/>
-          <a:p>
-            <a:r>
               <a:t>风险管理部认为，半导体 行业仍然面临若干</a:t>
             </a:r>
           </a:p>
@@ -3195,6 +3151,40 @@
           <a:p>
             <a:r>
               <a:t>以及市场竞争加剧等问题。</a:t>
+            </a:r>
+          </a:p>
+          <a:p/>
+          <a:p/>
+          <a:p>
+            <a:r>
+              <a:t>根据内部财务模型测算，通际名联网络有限公司 在未来三年</a:t>
+            </a:r>
+          </a:p>
+          <a:p>
+            <a:r>
+              <a:t>收入复合增长率预计可达到 28% 左右。</a:t>
+            </a:r>
+          </a:p>
+          <a:p>
+            <a:r>
+              <a:t>该预测基于行业需求增长以及公司产能扩张计划。</a:t>
+            </a:r>
+          </a:p>
+          <a:p/>
+          <a:p/>
+          <a:p>
+            <a:r>
+              <a:t>从产业链角度看，半导体 行业主要由上游设备厂商、</a:t>
+            </a:r>
+          </a:p>
+          <a:p>
+            <a:r>
+              <a:t>中游平台企业以及下游应用厂商组成。</a:t>
+            </a:r>
+          </a:p>
+          <a:p>
+            <a:r>
+              <a:t>联软网络有限公司 主要位于产业链的 下游 环节。</a:t>
             </a:r>
           </a:p>
           <a:p/>
@@ -3256,24 +3246,7 @@
           <a:p/>
           <a:p>
             <a:r>
-              <a:t>从产业链角度看，新能源 行业主要由上游设备厂商、</a:t>
-            </a:r>
-          </a:p>
-          <a:p>
-            <a:r>
-              <a:t>中游平台企业以及下游应用厂商组成。</a:t>
-            </a:r>
-          </a:p>
-          <a:p>
-            <a:r>
-              <a:t>九方信息有限公司 主要位于产业链的 下游 环节。</a:t>
-            </a:r>
-          </a:p>
-          <a:p/>
-          <a:p/>
-          <a:p>
-            <a:r>
-              <a:t>风险管理部认为，半导体 行业仍然面临若干</a:t>
+              <a:t>风险管理部认为，新能源 行业仍然面临若干</a:t>
             </a:r>
           </a:p>
           <a:p>
@@ -3290,12 +3263,29 @@
           <a:p/>
           <a:p>
             <a:r>
-              <a:t>华辰资本旗下的 HC Alpha Growth Fund 在最近的资产配置会议中</a:t>
-            </a:r>
-          </a:p>
-          <a:p>
-            <a:r>
-              <a:t>讨论了 云计算 行业的投资机会，并对 天益信息有限公司</a:t>
+              <a:t>华辰资本旗下的 HC AI Innovation Fund 在最近的资产配置会议中</a:t>
+            </a:r>
+          </a:p>
+          <a:p>
+            <a:r>
+              <a:t>讨论了 机器人 行业的投资机会，并对 毕博诚信息有限公司</a:t>
+            </a:r>
+          </a:p>
+          <a:p>
+            <a:r>
+              <a:t>进行了重点评估。</a:t>
+            </a:r>
+          </a:p>
+          <a:p/>
+          <a:p/>
+          <a:p>
+            <a:r>
+              <a:t>华辰资本旗下的 HC Energy Transition Fund 在最近的资产配置会议中</a:t>
+            </a:r>
+          </a:p>
+          <a:p>
+            <a:r>
+              <a:t>讨论了 云计算 行业的投资机会，并对 艾提科信科技有限公司</a:t>
             </a:r>
           </a:p>
           <a:p>
@@ -3362,7 +3352,24 @@
           <a:p/>
           <a:p>
             <a:r>
-              <a:t>从产业链角度看，半导体 行业主要由上游设备厂商、</a:t>
+              <a:t>风险管理部认为，云计算 行业仍然面临若干</a:t>
+            </a:r>
+          </a:p>
+          <a:p>
+            <a:r>
+              <a:t>不确定性因素，包括技术迭代风险、政策变化、</a:t>
+            </a:r>
+          </a:p>
+          <a:p>
+            <a:r>
+              <a:t>以及市场竞争加剧等问题。</a:t>
+            </a:r>
+          </a:p>
+          <a:p/>
+          <a:p/>
+          <a:p>
+            <a:r>
+              <a:t>从产业链角度看，医疗科技 行业主要由上游设备厂商、</a:t>
             </a:r>
           </a:p>
           <a:p>
@@ -3372,41 +3379,29 @@
           </a:p>
           <a:p>
             <a:r>
-              <a:t>天益科技有限公司 主要位于产业链的 上游 环节。</a:t>
-            </a:r>
-          </a:p>
-          <a:p/>
-          <a:p/>
-          <a:p>
-            <a:r>
-              <a:t>华辰资本旗下的 HC Alpha Growth Fund 在最近的资产配置会议中</a:t>
-            </a:r>
-          </a:p>
-          <a:p>
-            <a:r>
-              <a:t>讨论了 云计算 行业的投资机会，并对 国讯网络有限公司</a:t>
-            </a:r>
-          </a:p>
-          <a:p>
-            <a:r>
-              <a:t>进行了重点评估。</a:t>
-            </a:r>
-          </a:p>
-          <a:p/>
-          <a:p/>
-          <a:p>
-            <a:r>
-              <a:t>根据内部财务模型测算，雨林木风计算机网络有限公司 在未来三年</a:t>
-            </a:r>
-          </a:p>
-          <a:p>
-            <a:r>
-              <a:t>收入复合增长率预计可达到 20% 左右。</a:t>
-            </a:r>
-          </a:p>
-          <a:p>
-            <a:r>
-              <a:t>该预测基于行业需求增长以及公司产能扩张计划。</a:t>
+              <a:t>昊嘉科技有限公司 主要位于产业链的 下游 环节。</a:t>
+            </a:r>
+          </a:p>
+          <a:p/>
+          <a:p/>
+          <a:p>
+            <a:r>
+              <a:t>方正科技传媒有限公司 是中国 人工智能 行业的重要企业之一。</a:t>
+            </a:r>
+          </a:p>
+          <a:p>
+            <a:r>
+              <a:t>根据华辰资本 资产配置委员会 的研究，该公司成立于 2019 年，</a:t>
+            </a:r>
+          </a:p>
+          <a:p>
+            <a:r>
+              <a:t>目前员工规模约 2043 人。公司近年来持续加大研发投入，</a:t>
+            </a:r>
+          </a:p>
+          <a:p>
+            <a:r>
+              <a:t>在核心技术方面形成了较强的竞争壁垒。</a:t>
             </a:r>
           </a:p>
           <a:p/>
@@ -3468,51 +3463,61 @@
           <a:p/>
           <a:p>
             <a:r>
-              <a:t>从产业链角度看，消费科技 行业主要由上游设备厂商、</a:t>
-            </a:r>
-          </a:p>
-          <a:p>
-            <a:r>
-              <a:t>中游平台企业以及下游应用厂商组成。</a:t>
-            </a:r>
-          </a:p>
-          <a:p>
-            <a:r>
-              <a:t>南康网络有限公司 主要位于产业链的 中游 环节。</a:t>
-            </a:r>
-          </a:p>
-          <a:p/>
-          <a:p/>
-          <a:p>
-            <a:r>
-              <a:t>根据内部财务模型测算，精芯科技有限公司 在未来三年</a:t>
-            </a:r>
-          </a:p>
-          <a:p>
-            <a:r>
-              <a:t>收入复合增长率预计可达到 21% 左右。</a:t>
-            </a:r>
-          </a:p>
-          <a:p>
-            <a:r>
-              <a:t>该预测基于行业需求增长以及公司产能扩张计划。</a:t>
-            </a:r>
-          </a:p>
-          <a:p/>
-          <a:p/>
-          <a:p>
-            <a:r>
-              <a:t>风险管理部认为，半导体 行业仍然面临若干</a:t>
-            </a:r>
-          </a:p>
-          <a:p>
-            <a:r>
-              <a:t>不确定性因素，包括技术迭代风险、政策变化、</a:t>
-            </a:r>
-          </a:p>
-          <a:p>
-            <a:r>
-              <a:t>以及市场竞争加剧等问题。</a:t>
+              <a:t>方正科技信息有限公司 是中国 消费科技 行业的重要企业之一。</a:t>
+            </a:r>
+          </a:p>
+          <a:p>
+            <a:r>
+              <a:t>根据华辰资本 投资委员会 的研究，该公司成立于 2006 年，</a:t>
+            </a:r>
+          </a:p>
+          <a:p>
+            <a:r>
+              <a:t>目前员工规模约 4942 人。公司近年来持续加大研发投入，</a:t>
+            </a:r>
+          </a:p>
+          <a:p>
+            <a:r>
+              <a:t>在核心技术方面形成了较强的竞争壁垒。</a:t>
+            </a:r>
+          </a:p>
+          <a:p/>
+          <a:p/>
+          <a:p>
+            <a:r>
+              <a:t>明腾传媒有限公司 是中国 人工智能 行业的重要企业之一。</a:t>
+            </a:r>
+          </a:p>
+          <a:p>
+            <a:r>
+              <a:t>根据华辰资本 量化研究部 的研究，该公司成立于 2011 年，</a:t>
+            </a:r>
+          </a:p>
+          <a:p>
+            <a:r>
+              <a:t>目前员工规模约 2688 人。公司近年来持续加大研发投入，</a:t>
+            </a:r>
+          </a:p>
+          <a:p>
+            <a:r>
+              <a:t>在核心技术方面形成了较强的竞争壁垒。</a:t>
+            </a:r>
+          </a:p>
+          <a:p/>
+          <a:p/>
+          <a:p>
+            <a:r>
+              <a:t>华辰资本旗下的 HC Global Macro Fund 在最近的资产配置会议中</a:t>
+            </a:r>
+          </a:p>
+          <a:p>
+            <a:r>
+              <a:t>讨论了 半导体 行业的投资机会，并对 精芯信息有限公司</a:t>
+            </a:r>
+          </a:p>
+          <a:p>
+            <a:r>
+              <a:t>进行了重点评估。</a:t>
             </a:r>
           </a:p>
           <a:p/>
@@ -3574,7 +3579,46 @@
           <a:p/>
           <a:p>
             <a:r>
-              <a:t>风险管理部认为，新能源 行业仍然面临若干</a:t>
+              <a:t>创联世纪信息有限公司 是中国 云计算 行业的重要企业之一。</a:t>
+            </a:r>
+          </a:p>
+          <a:p>
+            <a:r>
+              <a:t>根据华辰资本 投资策略部 的研究，该公司成立于 2005 年，</a:t>
+            </a:r>
+          </a:p>
+          <a:p>
+            <a:r>
+              <a:t>目前员工规模约 3637 人。公司近年来持续加大研发投入，</a:t>
+            </a:r>
+          </a:p>
+          <a:p>
+            <a:r>
+              <a:t>在核心技术方面形成了较强的竞争壁垒。</a:t>
+            </a:r>
+          </a:p>
+          <a:p/>
+          <a:p/>
+          <a:p>
+            <a:r>
+              <a:t>从产业链角度看，消费科技 行业主要由上游设备厂商、</a:t>
+            </a:r>
+          </a:p>
+          <a:p>
+            <a:r>
+              <a:t>中游平台企业以及下游应用厂商组成。</a:t>
+            </a:r>
+          </a:p>
+          <a:p>
+            <a:r>
+              <a:t>鑫博腾飞信息有限公司 主要位于产业链的 中游 环节。</a:t>
+            </a:r>
+          </a:p>
+          <a:p/>
+          <a:p/>
+          <a:p>
+            <a:r>
+              <a:t>风险管理部认为，医疗科技 行业仍然面临若干</a:t>
             </a:r>
           </a:p>
           <a:p>
@@ -3585,45 +3629,6 @@
           <a:p>
             <a:r>
               <a:t>以及市场竞争加剧等问题。</a:t>
-            </a:r>
-          </a:p>
-          <a:p/>
-          <a:p/>
-          <a:p>
-            <a:r>
-              <a:t>根据内部财务模型测算，天益信息有限公司 在未来三年</a:t>
-            </a:r>
-          </a:p>
-          <a:p>
-            <a:r>
-              <a:t>收入复合增长率预计可达到 22% 左右。</a:t>
-            </a:r>
-          </a:p>
-          <a:p>
-            <a:r>
-              <a:t>该预测基于行业需求增长以及公司产能扩张计划。</a:t>
-            </a:r>
-          </a:p>
-          <a:p/>
-          <a:p/>
-          <a:p>
-            <a:r>
-              <a:t>凌云网络有限公司 是中国 医疗科技 行业的重要企业之一。</a:t>
-            </a:r>
-          </a:p>
-          <a:p>
-            <a:r>
-              <a:t>根据华辰资本 投资策略部 的研究，该公司成立于 2020 年，</a:t>
-            </a:r>
-          </a:p>
-          <a:p>
-            <a:r>
-              <a:t>目前员工规模约 730 人。公司近年来持续加大研发投入，</a:t>
-            </a:r>
-          </a:p>
-          <a:p>
-            <a:r>
-              <a:t>在核心技术方面形成了较强的竞争壁垒。</a:t>
             </a:r>
           </a:p>
           <a:p/>
@@ -3685,61 +3690,51 @@
           <a:p/>
           <a:p>
             <a:r>
-              <a:t>新宇龙信息传媒有限公司 是中国 机器人 行业的重要企业之一。</a:t>
-            </a:r>
-          </a:p>
-          <a:p>
-            <a:r>
-              <a:t>根据华辰资本 投资策略部 的研究，该公司成立于 2018 年，</a:t>
-            </a:r>
-          </a:p>
-          <a:p>
-            <a:r>
-              <a:t>目前员工规模约 6070 人。公司近年来持续加大研发投入，</a:t>
-            </a:r>
-          </a:p>
-          <a:p>
-            <a:r>
-              <a:t>在核心技术方面形成了较强的竞争壁垒。</a:t>
-            </a:r>
-          </a:p>
-          <a:p/>
-          <a:p/>
-          <a:p>
-            <a:r>
-              <a:t>天益信息有限公司 是中国 云计算 行业的重要企业之一。</a:t>
-            </a:r>
-          </a:p>
-          <a:p>
-            <a:r>
-              <a:t>根据华辰资本 资产配置委员会 的研究，该公司成立于 2015 年，</a:t>
-            </a:r>
-          </a:p>
-          <a:p>
-            <a:r>
-              <a:t>目前员工规模约 6900 人。公司近年来持续加大研发投入，</a:t>
-            </a:r>
-          </a:p>
-          <a:p>
-            <a:r>
-              <a:t>在核心技术方面形成了较强的竞争壁垒。</a:t>
-            </a:r>
-          </a:p>
-          <a:p/>
-          <a:p/>
-          <a:p>
-            <a:r>
-              <a:t>根据内部财务模型测算，昊嘉网络有限公司 在未来三年</a:t>
-            </a:r>
-          </a:p>
-          <a:p>
-            <a:r>
-              <a:t>收入复合增长率预计可达到 19% 左右。</a:t>
+              <a:t>从产业链角度看，新能源 行业主要由上游设备厂商、</a:t>
+            </a:r>
+          </a:p>
+          <a:p>
+            <a:r>
+              <a:t>中游平台企业以及下游应用厂商组成。</a:t>
+            </a:r>
+          </a:p>
+          <a:p>
+            <a:r>
+              <a:t>创汇传媒有限公司 主要位于产业链的 中游 环节。</a:t>
+            </a:r>
+          </a:p>
+          <a:p/>
+          <a:p/>
+          <a:p>
+            <a:r>
+              <a:t>根据内部财务模型测算，信诚致远科技有限公司 在未来三年</a:t>
+            </a:r>
+          </a:p>
+          <a:p>
+            <a:r>
+              <a:t>收入复合增长率预计可达到 25% 左右。</a:t>
             </a:r>
           </a:p>
           <a:p>
             <a:r>
               <a:t>该预测基于行业需求增长以及公司产能扩张计划。</a:t>
+            </a:r>
+          </a:p>
+          <a:p/>
+          <a:p/>
+          <a:p>
+            <a:r>
+              <a:t>从产业链角度看，消费科技 行业主要由上游设备厂商、</a:t>
+            </a:r>
+          </a:p>
+          <a:p>
+            <a:r>
+              <a:t>中游平台企业以及下游应用厂商组成。</a:t>
+            </a:r>
+          </a:p>
+          <a:p>
+            <a:r>
+              <a:t>联软科技有限公司 主要位于产业链的 上游 环节。</a:t>
             </a:r>
           </a:p>
           <a:p/>
@@ -3801,7 +3796,24 @@
           <a:p/>
           <a:p>
             <a:r>
-              <a:t>从产业链角度看，云计算 行业主要由上游设备厂商、</a:t>
+              <a:t>华辰资本旗下的 HC Quant Arbitrage Fund 在最近的资产配置会议中</a:t>
+            </a:r>
+          </a:p>
+          <a:p>
+            <a:r>
+              <a:t>讨论了 人工智能 行业的投资机会，并对 通际名联科技有限公司</a:t>
+            </a:r>
+          </a:p>
+          <a:p>
+            <a:r>
+              <a:t>进行了重点评估。</a:t>
+            </a:r>
+          </a:p>
+          <a:p/>
+          <a:p/>
+          <a:p>
+            <a:r>
+              <a:t>从产业链角度看，人工智能 行业主要由上游设备厂商、</a:t>
             </a:r>
           </a:p>
           <a:p>
@@ -3811,41 +3823,24 @@
           </a:p>
           <a:p>
             <a:r>
-              <a:t>精芯科技有限公司 主要位于产业链的 中游 环节。</a:t>
-            </a:r>
-          </a:p>
-          <a:p/>
-          <a:p/>
-          <a:p>
-            <a:r>
-              <a:t>风险管理部认为，云计算 行业仍然面临若干</a:t>
-            </a:r>
-          </a:p>
-          <a:p>
-            <a:r>
-              <a:t>不确定性因素，包括技术迭代风险、政策变化、</a:t>
-            </a:r>
-          </a:p>
-          <a:p>
-            <a:r>
-              <a:t>以及市场竞争加剧等问题。</a:t>
-            </a:r>
-          </a:p>
-          <a:p/>
-          <a:p/>
-          <a:p>
-            <a:r>
-              <a:t>根据内部财务模型测算，富罳信息有限公司 在未来三年</a:t>
-            </a:r>
-          </a:p>
-          <a:p>
-            <a:r>
-              <a:t>收入复合增长率预计可达到 31% 左右。</a:t>
-            </a:r>
-          </a:p>
-          <a:p>
-            <a:r>
-              <a:t>该预测基于行业需求增长以及公司产能扩张计划。</a:t>
+              <a:t>飞利信科技有限公司 主要位于产业链的 中游 环节。</a:t>
+            </a:r>
+          </a:p>
+          <a:p/>
+          <a:p/>
+          <a:p>
+            <a:r>
+              <a:t>华辰资本旗下的 HC Alpha Growth Fund 在最近的资产配置会议中</a:t>
+            </a:r>
+          </a:p>
+          <a:p>
+            <a:r>
+              <a:t>讨论了 人工智能 行业的投资机会，并对 巨奥传媒有限公司</a:t>
+            </a:r>
+          </a:p>
+          <a:p>
+            <a:r>
+              <a:t>进行了重点评估。</a:t>
             </a:r>
           </a:p>
           <a:p/>
@@ -3907,56 +3902,51 @@
           <a:p/>
           <a:p>
             <a:r>
-              <a:t>鸿睿思博网络有限公司 是中国 新能源 行业的重要企业之一。</a:t>
-            </a:r>
-          </a:p>
-          <a:p>
-            <a:r>
-              <a:t>根据华辰资本 投资策略部 的研究，该公司成立于 2015 年，</a:t>
-            </a:r>
-          </a:p>
-          <a:p>
-            <a:r>
-              <a:t>目前员工规模约 1240 人。公司近年来持续加大研发投入，</a:t>
-            </a:r>
-          </a:p>
-          <a:p>
-            <a:r>
-              <a:t>在核心技术方面形成了较强的竞争壁垒。</a:t>
-            </a:r>
-          </a:p>
-          <a:p/>
-          <a:p/>
-          <a:p>
-            <a:r>
-              <a:t>风险管理部认为，半导体 行业仍然面临若干</a:t>
-            </a:r>
-          </a:p>
-          <a:p>
-            <a:r>
-              <a:t>不确定性因素，包括技术迭代风险、政策变化、</a:t>
-            </a:r>
-          </a:p>
-          <a:p>
-            <a:r>
-              <a:t>以及市场竞争加剧等问题。</a:t>
-            </a:r>
-          </a:p>
-          <a:p/>
-          <a:p/>
-          <a:p>
-            <a:r>
-              <a:t>华辰资本旗下的 HC Global Macro Fund 在最近的资产配置会议中</a:t>
-            </a:r>
-          </a:p>
-          <a:p>
-            <a:r>
-              <a:t>讨论了 半导体 行业的投资机会，并对 浦华众城科技有限公司</a:t>
+              <a:t>华辰资本旗下的 HC Energy Transition Fund 在最近的资产配置会议中</a:t>
+            </a:r>
+          </a:p>
+          <a:p>
+            <a:r>
+              <a:t>讨论了 医疗科技 行业的投资机会，并对 华成育卓科技有限公司</a:t>
             </a:r>
           </a:p>
           <a:p>
             <a:r>
               <a:t>进行了重点评估。</a:t>
+            </a:r>
+          </a:p>
+          <a:p/>
+          <a:p/>
+          <a:p>
+            <a:r>
+              <a:t>根据内部财务模型测算，九方传媒有限公司 在未来三年</a:t>
+            </a:r>
+          </a:p>
+          <a:p>
+            <a:r>
+              <a:t>收入复合增长率预计可达到 33% 左右。</a:t>
+            </a:r>
+          </a:p>
+          <a:p>
+            <a:r>
+              <a:t>该预测基于行业需求增长以及公司产能扩张计划。</a:t>
+            </a:r>
+          </a:p>
+          <a:p/>
+          <a:p/>
+          <a:p>
+            <a:r>
+              <a:t>从产业链角度看，医疗科技 行业主要由上游设备厂商、</a:t>
+            </a:r>
+          </a:p>
+          <a:p>
+            <a:r>
+              <a:t>中游平台企业以及下游应用厂商组成。</a:t>
+            </a:r>
+          </a:p>
+          <a:p>
+            <a:r>
+              <a:t>九方传媒有限公司 主要位于产业链的 下游 环节。</a:t>
             </a:r>
           </a:p>
           <a:p/>
@@ -4018,12 +4008,12 @@
           <a:p/>
           <a:p>
             <a:r>
-              <a:t>根据内部财务模型测算，易动力科技有限公司 在未来三年</a:t>
-            </a:r>
-          </a:p>
-          <a:p>
-            <a:r>
-              <a:t>收入复合增长率预计可达到 13% 左右。</a:t>
+              <a:t>根据内部财务模型测算，良诺科技有限公司 在未来三年</a:t>
+            </a:r>
+          </a:p>
+          <a:p>
+            <a:r>
+              <a:t>收入复合增长率预计可达到 33% 左右。</a:t>
             </a:r>
           </a:p>
           <a:p>
@@ -4035,29 +4025,29 @@
           <a:p/>
           <a:p>
             <a:r>
-              <a:t>从产业链角度看，人工智能 行业主要由上游设备厂商、</a:t>
-            </a:r>
-          </a:p>
-          <a:p>
-            <a:r>
-              <a:t>中游平台企业以及下游应用厂商组成。</a:t>
-            </a:r>
-          </a:p>
-          <a:p>
-            <a:r>
-              <a:t>和泰科技有限公司 主要位于产业链的 下游 环节。</a:t>
-            </a:r>
-          </a:p>
-          <a:p/>
-          <a:p/>
-          <a:p>
-            <a:r>
-              <a:t>华辰资本旗下的 HC Energy Transition Fund 在最近的资产配置会议中</a:t>
-            </a:r>
-          </a:p>
-          <a:p>
-            <a:r>
-              <a:t>讨论了 消费科技 行业的投资机会，并对 和泰传媒有限公司</a:t>
+              <a:t>华辰资本旗下的 HC Alpha Growth Fund 在最近的资产配置会议中</a:t>
+            </a:r>
+          </a:p>
+          <a:p>
+            <a:r>
+              <a:t>讨论了 半导体 行业的投资机会，并对 精芯信息有限公司</a:t>
+            </a:r>
+          </a:p>
+          <a:p>
+            <a:r>
+              <a:t>进行了重点评估。</a:t>
+            </a:r>
+          </a:p>
+          <a:p/>
+          <a:p/>
+          <a:p>
+            <a:r>
+              <a:t>华辰资本旗下的 HC AI Innovation Fund 在最近的资产配置会议中</a:t>
+            </a:r>
+          </a:p>
+          <a:p>
+            <a:r>
+              <a:t>讨论了 云计算 行业的投资机会，并对 佳禾传媒有限公司</a:t>
             </a:r>
           </a:p>
           <a:p>
@@ -4124,12 +4114,12 @@
           <a:p/>
           <a:p>
             <a:r>
-              <a:t>根据内部财务模型测算，信诚致远传媒有限公司 在未来三年</a:t>
-            </a:r>
-          </a:p>
-          <a:p>
-            <a:r>
-              <a:t>收入复合增长率预计可达到 30% 左右。</a:t>
+              <a:t>根据内部财务模型测算，精芯信息有限公司 在未来三年</a:t>
+            </a:r>
+          </a:p>
+          <a:p>
+            <a:r>
+              <a:t>收入复合增长率预计可达到 25% 左右。</a:t>
             </a:r>
           </a:p>
           <a:p>
@@ -4141,34 +4131,34 @@
           <a:p/>
           <a:p>
             <a:r>
-              <a:t>华辰资本旗下的 HC Global Macro Fund 在最近的资产配置会议中</a:t>
-            </a:r>
-          </a:p>
-          <a:p>
-            <a:r>
-              <a:t>讨论了 云计算 行业的投资机会，并对 天益信息有限公司</a:t>
-            </a:r>
-          </a:p>
-          <a:p>
-            <a:r>
-              <a:t>进行了重点评估。</a:t>
-            </a:r>
-          </a:p>
-          <a:p/>
-          <a:p/>
-          <a:p>
-            <a:r>
-              <a:t>华辰资本旗下的 HC Energy Transition Fund 在最近的资产配置会议中</a:t>
-            </a:r>
-          </a:p>
-          <a:p>
-            <a:r>
-              <a:t>讨论了 人工智能 行业的投资机会，并对 和泰科技有限公司</a:t>
-            </a:r>
-          </a:p>
-          <a:p>
-            <a:r>
-              <a:t>进行了重点评估。</a:t>
+              <a:t>根据内部财务模型测算，良诺科技有限公司 在未来三年</a:t>
+            </a:r>
+          </a:p>
+          <a:p>
+            <a:r>
+              <a:t>收入复合增长率预计可达到 34% 左右。</a:t>
+            </a:r>
+          </a:p>
+          <a:p>
+            <a:r>
+              <a:t>该预测基于行业需求增长以及公司产能扩张计划。</a:t>
+            </a:r>
+          </a:p>
+          <a:p/>
+          <a:p/>
+          <a:p>
+            <a:r>
+              <a:t>根据内部财务模型测算，新格林耐特网络有限公司 在未来三年</a:t>
+            </a:r>
+          </a:p>
+          <a:p>
+            <a:r>
+              <a:t>收入复合增长率预计可达到 15% 左右。</a:t>
+            </a:r>
+          </a:p>
+          <a:p>
+            <a:r>
+              <a:t>该预测基于行业需求增长以及公司产能扩张计划。</a:t>
             </a:r>
           </a:p>
           <a:p/>
@@ -4230,12 +4220,12 @@
           <a:p/>
           <a:p>
             <a:r>
-              <a:t>根据内部财务模型测算，富罳信息有限公司 在未来三年</a:t>
-            </a:r>
-          </a:p>
-          <a:p>
-            <a:r>
-              <a:t>收入复合增长率预计可达到 10% 左右。</a:t>
+              <a:t>根据内部财务模型测算，飞海科技传媒有限公司 在未来三年</a:t>
+            </a:r>
+          </a:p>
+          <a:p>
+            <a:r>
+              <a:t>收入复合增长率预计可达到 12% 左右。</a:t>
             </a:r>
           </a:p>
           <a:p>
@@ -4247,34 +4237,39 @@
           <a:p/>
           <a:p>
             <a:r>
-              <a:t>华辰资本旗下的 HC Global Macro Fund 在最近的资产配置会议中</a:t>
-            </a:r>
-          </a:p>
-          <a:p>
-            <a:r>
-              <a:t>讨论了 机器人 行业的投资机会，并对 新宇龙信息传媒有限公司</a:t>
-            </a:r>
-          </a:p>
-          <a:p>
-            <a:r>
-              <a:t>进行了重点评估。</a:t>
-            </a:r>
-          </a:p>
-          <a:p/>
-          <a:p/>
-          <a:p>
-            <a:r>
-              <a:t>从产业链角度看，新能源 行业主要由上游设备厂商、</a:t>
-            </a:r>
-          </a:p>
-          <a:p>
-            <a:r>
-              <a:t>中游平台企业以及下游应用厂商组成。</a:t>
-            </a:r>
-          </a:p>
-          <a:p>
-            <a:r>
-              <a:t>飞利信科技有限公司 主要位于产业链的 下游 环节。</a:t>
+              <a:t>风险管理部认为，云计算 行业仍然面临若干</a:t>
+            </a:r>
+          </a:p>
+          <a:p>
+            <a:r>
+              <a:t>不确定性因素，包括技术迭代风险、政策变化、</a:t>
+            </a:r>
+          </a:p>
+          <a:p>
+            <a:r>
+              <a:t>以及市场竞争加剧等问题。</a:t>
+            </a:r>
+          </a:p>
+          <a:p/>
+          <a:p/>
+          <a:p>
+            <a:r>
+              <a:t>通际名联网络有限公司 是中国 机器人 行业的重要企业之一。</a:t>
+            </a:r>
+          </a:p>
+          <a:p>
+            <a:r>
+              <a:t>根据华辰资本 投资委员会 的研究，该公司成立于 2016 年，</a:t>
+            </a:r>
+          </a:p>
+          <a:p>
+            <a:r>
+              <a:t>目前员工规模约 3310 人。公司近年来持续加大研发投入，</a:t>
+            </a:r>
+          </a:p>
+          <a:p>
+            <a:r>
+              <a:t>在核心技术方面形成了较强的竞争壁垒。</a:t>
             </a:r>
           </a:p>
           <a:p/>
@@ -4336,34 +4331,29 @@
           <a:p/>
           <a:p>
             <a:r>
-              <a:t>华远软件信息有限公司 是中国 半导体 行业的重要企业之一。</a:t>
-            </a:r>
-          </a:p>
-          <a:p>
-            <a:r>
-              <a:t>根据华辰资本 量化研究部 的研究，该公司成立于 2015 年，</a:t>
-            </a:r>
-          </a:p>
-          <a:p>
-            <a:r>
-              <a:t>目前员工规模约 6302 人。公司近年来持续加大研发投入，</a:t>
-            </a:r>
-          </a:p>
-          <a:p>
-            <a:r>
-              <a:t>在核心技术方面形成了较强的竞争壁垒。</a:t>
-            </a:r>
-          </a:p>
-          <a:p/>
-          <a:p/>
-          <a:p>
-            <a:r>
-              <a:t>华辰资本旗下的 HC Global Macro Fund 在最近的资产配置会议中</a:t>
-            </a:r>
-          </a:p>
-          <a:p>
-            <a:r>
-              <a:t>讨论了 半导体 行业的投资机会，并对 天益科技有限公司</a:t>
+              <a:t>根据内部财务模型测算，富罳网络有限公司 在未来三年</a:t>
+            </a:r>
+          </a:p>
+          <a:p>
+            <a:r>
+              <a:t>收入复合增长率预计可达到 10% 左右。</a:t>
+            </a:r>
+          </a:p>
+          <a:p>
+            <a:r>
+              <a:t>该预测基于行业需求增长以及公司产能扩张计划。</a:t>
+            </a:r>
+          </a:p>
+          <a:p/>
+          <a:p/>
+          <a:p>
+            <a:r>
+              <a:t>华辰资本旗下的 HC Alpha Growth Fund 在最近的资产配置会议中</a:t>
+            </a:r>
+          </a:p>
+          <a:p>
+            <a:r>
+              <a:t>讨论了 人工智能 行业的投资机会，并对 惠派国际公司科技有限公司</a:t>
             </a:r>
           </a:p>
           <a:p>
@@ -4375,17 +4365,17 @@
           <a:p/>
           <a:p>
             <a:r>
-              <a:t>风险管理部认为，云计算 行业仍然面临若干</a:t>
-            </a:r>
-          </a:p>
-          <a:p>
-            <a:r>
-              <a:t>不确定性因素，包括技术迭代风险、政策变化、</a:t>
-            </a:r>
-          </a:p>
-          <a:p>
-            <a:r>
-              <a:t>以及市场竞争加剧等问题。</a:t>
+              <a:t>从产业链角度看，新能源 行业主要由上游设备厂商、</a:t>
+            </a:r>
+          </a:p>
+          <a:p>
+            <a:r>
+              <a:t>中游平台企业以及下游应用厂商组成。</a:t>
+            </a:r>
+          </a:p>
+          <a:p>
+            <a:r>
+              <a:t>戴硕电子网络有限公司 主要位于产业链的 上游 环节。</a:t>
             </a:r>
           </a:p>
           <a:p/>
@@ -4447,7 +4437,7 @@
           <a:p/>
           <a:p>
             <a:r>
-              <a:t>从产业链角度看，云计算 行业主要由上游设备厂商、</a:t>
+              <a:t>从产业链角度看，人工智能 行业主要由上游设备厂商、</a:t>
             </a:r>
           </a:p>
           <a:p>
@@ -4457,41 +4447,41 @@
           </a:p>
           <a:p>
             <a:r>
-              <a:t>易动力科技有限公司 主要位于产业链的 中游 环节。</a:t>
-            </a:r>
-          </a:p>
-          <a:p/>
-          <a:p/>
-          <a:p>
-            <a:r>
-              <a:t>从产业链角度看，人工智能 行业主要由上游设备厂商、</a:t>
-            </a:r>
-          </a:p>
-          <a:p>
-            <a:r>
-              <a:t>中游平台企业以及下游应用厂商组成。</a:t>
-            </a:r>
-          </a:p>
-          <a:p>
-            <a:r>
-              <a:t>信诚致远传媒有限公司 主要位于产业链的 下游 环节。</a:t>
-            </a:r>
-          </a:p>
-          <a:p/>
-          <a:p/>
-          <a:p>
-            <a:r>
-              <a:t>从产业链角度看，消费科技 行业主要由上游设备厂商、</a:t>
-            </a:r>
-          </a:p>
-          <a:p>
-            <a:r>
-              <a:t>中游平台企业以及下游应用厂商组成。</a:t>
-            </a:r>
-          </a:p>
-          <a:p>
-            <a:r>
-              <a:t>精芯信息有限公司 主要位于产业链的 上游 环节。</a:t>
+              <a:t>明腾传媒有限公司 主要位于产业链的 下游 环节。</a:t>
+            </a:r>
+          </a:p>
+          <a:p/>
+          <a:p/>
+          <a:p>
+            <a:r>
+              <a:t>根据内部财务模型测算，飞利信科技有限公司 在未来三年</a:t>
+            </a:r>
+          </a:p>
+          <a:p>
+            <a:r>
+              <a:t>收入复合增长率预计可达到 31% 左右。</a:t>
+            </a:r>
+          </a:p>
+          <a:p>
+            <a:r>
+              <a:t>该预测基于行业需求增长以及公司产能扩张计划。</a:t>
+            </a:r>
+          </a:p>
+          <a:p/>
+          <a:p/>
+          <a:p>
+            <a:r>
+              <a:t>风险管理部认为，机器人 行业仍然面临若干</a:t>
+            </a:r>
+          </a:p>
+          <a:p>
+            <a:r>
+              <a:t>不确定性因素，包括技术迭代风险、政策变化、</a:t>
+            </a:r>
+          </a:p>
+          <a:p>
+            <a:r>
+              <a:t>以及市场竞争加剧等问题。</a:t>
             </a:r>
           </a:p>
           <a:p/>
@@ -4553,41 +4543,7 @@
           <a:p/>
           <a:p>
             <a:r>
-              <a:t>华辰资本旗下的 HC Global Macro Fund 在最近的资产配置会议中</a:t>
-            </a:r>
-          </a:p>
-          <a:p>
-            <a:r>
-              <a:t>讨论了 云计算 行业的投资机会，并对 立信电子网络有限公司</a:t>
-            </a:r>
-          </a:p>
-          <a:p>
-            <a:r>
-              <a:t>进行了重点评估。</a:t>
-            </a:r>
-          </a:p>
-          <a:p/>
-          <a:p/>
-          <a:p>
-            <a:r>
-              <a:t>从产业链角度看，新能源 行业主要由上游设备厂商、</a:t>
-            </a:r>
-          </a:p>
-          <a:p>
-            <a:r>
-              <a:t>中游平台企业以及下游应用厂商组成。</a:t>
-            </a:r>
-          </a:p>
-          <a:p>
-            <a:r>
-              <a:t>东方峻景传媒有限公司 主要位于产业链的 下游 环节。</a:t>
-            </a:r>
-          </a:p>
-          <a:p/>
-          <a:p/>
-          <a:p>
-            <a:r>
-              <a:t>风险管理部认为，半导体 行业仍然面临若干</a:t>
+              <a:t>风险管理部认为，新能源 行业仍然面临若干</a:t>
             </a:r>
           </a:p>
           <a:p>
@@ -4598,6 +4554,45 @@
           <a:p>
             <a:r>
               <a:t>以及市场竞争加剧等问题。</a:t>
+            </a:r>
+          </a:p>
+          <a:p/>
+          <a:p/>
+          <a:p>
+            <a:r>
+              <a:t>风险管理部认为，人工智能 行业仍然面临若干</a:t>
+            </a:r>
+          </a:p>
+          <a:p>
+            <a:r>
+              <a:t>不确定性因素，包括技术迭代风险、政策变化、</a:t>
+            </a:r>
+          </a:p>
+          <a:p>
+            <a:r>
+              <a:t>以及市场竞争加剧等问题。</a:t>
+            </a:r>
+          </a:p>
+          <a:p/>
+          <a:p/>
+          <a:p>
+            <a:r>
+              <a:t>新格林耐特网络有限公司 是中国 人工智能 行业的重要企业之一。</a:t>
+            </a:r>
+          </a:p>
+          <a:p>
+            <a:r>
+              <a:t>根据华辰资本 投资策略部 的研究，该公司成立于 2016 年，</a:t>
+            </a:r>
+          </a:p>
+          <a:p>
+            <a:r>
+              <a:t>目前员工规模约 5006 人。公司近年来持续加大研发投入，</a:t>
+            </a:r>
+          </a:p>
+          <a:p>
+            <a:r>
+              <a:t>在核心技术方面形成了较强的竞争壁垒。</a:t>
             </a:r>
           </a:p>
           <a:p/>
@@ -4659,51 +4654,51 @@
           <a:p/>
           <a:p>
             <a:r>
-              <a:t>风险管理部认为，新能源 行业仍然面临若干</a:t>
-            </a:r>
-          </a:p>
-          <a:p>
-            <a:r>
-              <a:t>不确定性因素，包括技术迭代风险、政策变化、</a:t>
-            </a:r>
-          </a:p>
-          <a:p>
-            <a:r>
-              <a:t>以及市场竞争加剧等问题。</a:t>
-            </a:r>
-          </a:p>
-          <a:p/>
-          <a:p/>
-          <a:p>
-            <a:r>
-              <a:t>根据内部财务模型测算，创亿网络有限公司 在未来三年</a:t>
-            </a:r>
-          </a:p>
-          <a:p>
-            <a:r>
-              <a:t>收入复合增长率预计可达到 26% 左右。</a:t>
+              <a:t>华辰资本旗下的 HC Energy Transition Fund 在最近的资产配置会议中</a:t>
+            </a:r>
+          </a:p>
+          <a:p>
+            <a:r>
+              <a:t>讨论了 半导体 行业的投资机会，并对 精芯信息有限公司</a:t>
+            </a:r>
+          </a:p>
+          <a:p>
+            <a:r>
+              <a:t>进行了重点评估。</a:t>
+            </a:r>
+          </a:p>
+          <a:p/>
+          <a:p/>
+          <a:p>
+            <a:r>
+              <a:t>华辰资本旗下的 HC Energy Transition Fund 在最近的资产配置会议中</a:t>
+            </a:r>
+          </a:p>
+          <a:p>
+            <a:r>
+              <a:t>讨论了 消费科技 行业的投资机会，并对 天开科技有限公司</a:t>
+            </a:r>
+          </a:p>
+          <a:p>
+            <a:r>
+              <a:t>进行了重点评估。</a:t>
+            </a:r>
+          </a:p>
+          <a:p/>
+          <a:p/>
+          <a:p>
+            <a:r>
+              <a:t>根据内部财务模型测算，图龙信息传媒有限公司 在未来三年</a:t>
+            </a:r>
+          </a:p>
+          <a:p>
+            <a:r>
+              <a:t>收入复合增长率预计可达到 21% 左右。</a:t>
             </a:r>
           </a:p>
           <a:p>
             <a:r>
               <a:t>该预测基于行业需求增长以及公司产能扩张计划。</a:t>
-            </a:r>
-          </a:p>
-          <a:p/>
-          <a:p/>
-          <a:p>
-            <a:r>
-              <a:t>华辰资本旗下的 HC Global Macro Fund 在最近的资产配置会议中</a:t>
-            </a:r>
-          </a:p>
-          <a:p>
-            <a:r>
-              <a:t>讨论了 医疗科技 行业的投资机会，并对 凌云网络有限公司</a:t>
-            </a:r>
-          </a:p>
-          <a:p>
-            <a:r>
-              <a:t>进行了重点评估。</a:t>
             </a:r>
           </a:p>
           <a:p/>
